--- a/Storyboarding/NewLectures/01_Intro_to_Storyboarding.pptx
+++ b/Storyboarding/NewLectures/01_Intro_to_Storyboarding.pptx
@@ -1861,7 +1861,7 @@
           <a:lstStyle/>
           <a:p>
             <a:r>
-              <a:t>Everything they just inferred came from staging — where the character is, what is around them, what the props say, where the camera was put.</a:t>
+              <a:t>Everything they just inferred came from staging, where the character is, what is around them, what the props say, where the camera was put.</a:t>
             </a:r>
           </a:p>
           <a:p/>
@@ -2281,7 +2281,7 @@
           <a:p/>
           <a:p>
             <a:r>
-              <a:t>The order matters and it is the thing beginners get backwards. Draw the line of action first — one curve describing what the body is doing — and then hang the shapes on it. If you build the shapes first and try to add energy afterwards, you get a mannequin.</a:t>
+              <a:t>The order matters and it is the thing beginners get backwards. Draw the line of action first, one curve describing what the body is doing, and then hang the shapes on it. If you build the shapes first and try to add energy afterwards, you get a mannequin.</a:t>
             </a:r>
           </a:p>
           <a:p/>
@@ -2669,7 +2669,7 @@
           <a:p/>
           <a:p>
             <a:r>
-              <a:t>Two tools. Blocking — physically move the character away from the thing. And time — hold the shot. Reluctance reads as duration, which means this is the first stage where your timing decisions carry story weight. You will feel this properly when you build your animatic.</a:t>
+              <a:t>Two tools. Blocking: physically move the character away from the thing. And time: hold the shot. Reluctance reads as duration, which means this is the first stage where your timing decisions carry story weight. You will feel this properly when you build your animatic.</a:t>
             </a:r>
           </a:p>
           <a:p/>
@@ -2790,7 +2790,7 @@
           <a:lstStyle/>
           <a:p>
             <a:r>
-              <a:t>When you show a story, you are moulding the message into visual imagery — which means you are making choices the audience never sees but always feels.</a:t>
+              <a:t>When you show a story, you are moulding the message into visual imagery, which means you are making choices the audience never sees but always feels.</a:t>
             </a:r>
           </a:p>
           <a:p/>
@@ -3047,7 +3047,7 @@
           <a:lstStyle/>
           <a:p>
             <a:r>
-              <a:t>Read this one aloud. It is the 'telling' version — everything explained, nothing seen.</a:t>
+              <a:t>Read this one aloud. It is the 'telling' version. Everything explained, nothing seen.</a:t>
             </a:r>
           </a:p>
           <a:p/>
@@ -3305,7 +3305,7 @@
           <a:p/>
           <a:p>
             <a:r>
-              <a:t>The tools are compositional. Neutral camera height, because a neutral world should not feel dramatic yet. Repetition, because routine is visual rhythm. And then the one detail that says this character does not fit — which is usually just where you place them in frame.</a:t>
+              <a:t>The tools are compositional. Neutral camera height, because a neutral world should not feel dramatic yet. Repetition, because routine is visual rhythm. And then the one detail that says this character does not fit, which is usually just where you place them in frame.</a:t>
             </a:r>
           </a:p>
           <a:p/>
@@ -3426,7 +3426,7 @@
           <a:lstStyle/>
           <a:p>
             <a:r>
-              <a:t>Most stories start as an idea with no structure — a dream, an image, a fragment. That is normal and it is not a problem.</a:t>
+              <a:t>Most stories start as an idea with no structure: a dream, an image, a fragment. That is normal and it is not a problem.</a:t>
             </a:r>
           </a:p>
           <a:p/>
@@ -3534,7 +3534,7 @@
           <a:lstStyle/>
           <a:p>
             <a:r>
-              <a:t>[ADD IMAGES: three images side by side — polished concept art, a genuinely crude production board panel, and the finished film frame that panel became.]</a:t>
+              <a:t>[ADD IMAGES: three images side by side: polished concept art, a genuinely crude production board panel, and the finished film frame that panel became.]</a:t>
             </a:r>
           </a:p>
           <a:p/>
@@ -3698,7 +3698,7 @@
           <a:lstStyle/>
           <a:p>
             <a:r>
-              <a:t>[ADD IMAGES: a grid of genuinely crude professional production boards — the kind with visible construction lines and stick-figure staging.]</a:t>
+              <a:t>[ADD IMAGES: a grid of genuinely crude professional production boards: the kind with visible construction lines and stick-figure staging.]</a:t>
             </a:r>
           </a:p>
           <a:p/>
@@ -3786,7 +3786,7 @@
           <a:lstStyle/>
           <a:p>
             <a:r>
-              <a:t>This replaces the abstract structure discussion. Screen a short complete sequence — three to eight minutes — with a clean, visible arc.</a:t>
+              <a:t>This replaces the abstract structure discussion. Screen a short complete sequence, three to eight minutes, with a clean, visible arc.</a:t>
             </a:r>
           </a:p>
           <a:p/>
@@ -3868,7 +3868,7 @@
           <a:lstStyle/>
           <a:p>
             <a:r>
-              <a:t>Build this live on the board. Do not present it — ask the questions and write down what they say.</a:t>
+              <a:t>Build this live on the board. Do not present it: ask the questions and write down what they say.</a:t>
             </a:r>
           </a:p>
           <a:p/>
@@ -3956,7 +3956,7 @@
           <a:p/>
           <a:p>
             <a:r>
-              <a:t>Students tend to think a hook means an explosion. It does not. A hook can be entirely quiet — someone packing a suitcase, a phone ringing that nobody answers. What matters is that the audience now wants something they do not have.</a:t>
+              <a:t>Students tend to think a hook means an explosion. It does not. A hook can be entirely quiet: someone packing a suitcase, a phone ringing that nobody answers. What matters is that the audience now wants something they do not have.</a:t>
             </a:r>
           </a:p>
           <a:p/>
@@ -4273,7 +4273,7 @@
           <a:p/>
           <a:p>
             <a:r>
-              <a:t>Practically that means changing something structural — the shot size, the camera height, the cutting rate — not just introducing a new character. If the call arrives in the same visual language as the ordinary world, it does not feel like a call.</a:t>
+              <a:t>Practically that means changing something structural (the shot size, the camera height, the cutting rate) not just introducing a new character. If the call arrives in the same visual language as the ordinary world, it does not feel like a call.</a:t>
             </a:r>
           </a:p>
         </p:txBody>
@@ -4388,7 +4388,7 @@
           <a:lstStyle/>
           <a:p>
             <a:r>
-              <a:t>The shape of the monomyth. Do not walk every station on this diagram — it is here as a reference and it will be on Canvas.</a:t>
+              <a:t>The shape of the monomyth. Do not walk every station on this diagram. It is here as a reference and it will be on Canvas.</a:t>
             </a:r>
           </a:p>
           <a:p/>
@@ -4584,7 +4584,7 @@
           <a:p/>
           <a:p>
             <a:r>
-              <a:t>The mistake is making the new world look like the old one. If you do that, you have wasted the threshold you just built — the audience crossed something and nothing changed.</a:t>
+              <a:t>The mistake is making the new world look like the old one. If you do that, you have wasted the threshold you just built: the audience crossed something and nothing changed.</a:t>
             </a:r>
           </a:p>
           <a:p/>
@@ -4754,7 +4754,7 @@
           <a:p/>
           <a:p>
             <a:r>
-              <a:t>And here is a practical note about your own labour, which nobody tells students: most student boards are rendered evenly from the first panel to the last. That means nothing is emphasised. Budget your effort the way you budget your shots — spend it here.</a:t>
+              <a:t>And here is a practical note about your own labour, which nobody tells students: most student boards are rendered evenly from the first panel to the last. That means nothing is emphasised. Budget your effort the way you budget your shots: spend it here.</a:t>
             </a:r>
           </a:p>
         </p:txBody>
@@ -4912,7 +4912,7 @@
           <a:p/>
           <a:p>
             <a:r>
-              <a:t>In animation, the board is the primary document. Nothing exists before it and everything is built from it. In live action, boarding is targeted — stunts, effects, anything expensive enough that guessing is unaffordable.</a:t>
+              <a:t>In animation, the board is the primary document. Nothing exists before it and everything is built from it. In live action, boarding is targeted: stunts, effects, anything expensive enough that guessing is unaffordable.</a:t>
             </a:r>
           </a:p>
           <a:p/>
@@ -5033,7 +5033,7 @@
           <a:lstStyle/>
           <a:p>
             <a:r>
-              <a:t>Every piece of visual media is trying to do something to you — sell you something, make you feel something, or make you understand something.</a:t>
+              <a:t>Every piece of visual media is trying to do something to you: sell you something, make you feel something, or make you understand something.</a:t>
             </a:r>
           </a:p>
           <a:p/>
@@ -5147,7 +5147,7 @@
           <a:p/>
           <a:p>
             <a:r>
-              <a:t>That sounds limiting and it is not. The skill being hired is the ability to take a description and return something clearer than the description was — and then to notice the thing the director had not thought of and offer it.</a:t>
+              <a:t>That sounds limiting and it is not. The skill being hired is the ability to take a description and return something clearer than the description was, and then to notice the thing the director had not thought of and offer it.</a:t>
             </a:r>
           </a:p>
           <a:p/>
@@ -5229,7 +5229,7 @@
           <a:p/>
           <a:p>
             <a:r>
-              <a:t>Point back to slide four. Those boards are crude and they are professional work. The skill being assessed in this course is notation — recording a visual idea clearly enough that another person can act on it.</a:t>
+              <a:t>Point back to slide four. Those boards are crude and they are professional work. The skill being assessed in this course is notation: recording a visual idea clearly enough that another person can act on it.</a:t>
             </a:r>
           </a:p>
           <a:p/>
@@ -5558,7 +5558,7 @@
           <a:p/>
           <a:p>
             <a:r>
-              <a:t>Draw what carries the story. Suggest everything else, and trust the audience to fill it in — which, as we will see in the composition session, they will do automatically.</a:t>
+              <a:t>Draw what carries the story. Suggest everything else, and trust the audience to fill it in, which, as we will see in the composition session, they will do automatically.</a:t>
             </a:r>
           </a:p>
         </p:txBody>
@@ -5716,7 +5716,7 @@
           <a:lstStyle/>
           <a:p>
             <a:r>
-              <a:t>Project ten clear, readable actions: reaching, falling, throwing, listening, hiding, running, pointing, lifting, recoiling, waiting. Sixty to ninety seconds each — fast enough that nobody has time to render.</a:t>
+              <a:t>Project ten clear, readable actions: reaching, falling, throwing, listening, hiding, running, pointing, lifting, recoiling, waiting. Sixty to ninety seconds each: fast enough that nobody has time to render.</a:t>
             </a:r>
           </a:p>
           <a:p/>
@@ -5728,7 +5728,7 @@
           <a:p/>
           <a:p>
             <a:r>
-              <a:t>This is the exit ticket. Post it before you leave. Graded on existing, not on quality — rough, wrong, and ugly all receive full credit.</a:t>
+              <a:t>This is the exit ticket. Post it before you leave. Graded on existing, not on quality: rough, wrong, and ugly all receive full credit.</a:t>
             </a:r>
           </a:p>
         </p:txBody>
@@ -6149,7 +6149,7 @@
           <a:lstStyle/>
           <a:p>
             <a:r>
-              <a:t>A picture is worth a thousand words — but the useful half of that saying is the second half. Leave enough in the frame that the audience can construct the meaning themselves.</a:t>
+              <a:t>A picture is worth a thousand words, but the useful half of that saying is the second half. Leave enough in the frame that the audience can construct the meaning themselves.</a:t>
             </a:r>
           </a:p>
           <a:p/>
@@ -6308,7 +6308,7 @@
           <a:p/>
           <a:p>
             <a:r>
-              <a:t>The closest visual cousin is a comic strip. The critical difference is that comics are the finished product and boards are the plan — which is why boards can be rough and comics cannot.</a:t>
+              <a:t>The closest visual cousin is a comic strip. The critical difference is that comics are the finished product and boards are the plan, which is why boards can be rough and comics cannot.</a:t>
             </a:r>
           </a:p>
         </p:txBody>
@@ -6461,7 +6461,7 @@
           <a:p/>
           <a:p>
             <a:r>
-              <a:t>By now that definition should feel obvious, which is the point — you have arrived at it from several directions in one session.</a:t>
+              <a:t>By now that definition should feel obvious, which is the point. You have arrived at it from several directions in one session.</a:t>
             </a:r>
           </a:p>
         </p:txBody>
@@ -6608,7 +6608,7 @@
           <a:lstStyle/>
           <a:p>
             <a:r>
-              <a:t>Advertising, games, animation, feature films, television — and previs, which is a large and growing department on most big productions.</a:t>
+              <a:t>Advertising, games, animation, feature films, television, and previs, which is a large and growing department on most big productions.</a:t>
             </a:r>
           </a:p>
           <a:p/>
@@ -23776,7 +23776,7 @@
             </a:pPr>
             <a:r>
               <a:rPr lang="en-US"/>
-              <a:t>A rough production board panel — scratchy, arrows everywhere</a:t>
+              <a:t>A rough production board panel: scratchy, arrows everywhere</a:t>
             </a:r>
             <a:endParaRPr/>
           </a:p>
@@ -25600,7 +25600,7 @@
             </a:pPr>
             <a:r>
               <a:rPr lang="en-US"/>
-              <a:t>Frame the hero slightly out of place — off-centre, wrong scale, alone in a crowd</a:t>
+              <a:t>Frame the hero slightly out of place: off-centre, wrong scale, alone in a crowd</a:t>
             </a:r>
             <a:endParaRPr/>
           </a:p>
@@ -25753,7 +25753,7 @@
             </a:pPr>
             <a:r>
               <a:rPr lang="en-US"/>
-              <a:t>— before anyone spends money</a:t>
+              <a:t>: before anyone spends money</a:t>
             </a:r>
             <a:endParaRPr/>
           </a:p>
@@ -26093,7 +26093,7 @@
             </a:pPr>
             <a:r>
               <a:rPr lang="en-US"/>
-              <a:t>Thresholds the character does not cross — doorways, gates, edges</a:t>
+              <a:t>Thresholds the character does not cross: doorways, gates, edges</a:t>
             </a:r>
             <a:endParaRPr/>
           </a:p>
@@ -26127,7 +26127,7 @@
             </a:pPr>
             <a:r>
               <a:rPr lang="en-US"/>
-              <a:t>Without the refusal, there is no decision — and no story</a:t>
+              <a:t>Without the refusal, there is no decision, and no story</a:t>
             </a:r>
             <a:endParaRPr/>
           </a:p>
@@ -26297,7 +26297,7 @@
             </a:pPr>
             <a:r>
               <a:rPr lang="en-US"/>
-              <a:t>The metaphor is already a set — build it</a:t>
+              <a:t>The metaphor is already a set: build it</a:t>
             </a:r>
             <a:endParaRPr/>
           </a:p>
@@ -26416,7 +26416,7 @@
             </a:pPr>
             <a:r>
               <a:rPr lang="en-US"/>
-              <a:t>New establishing shots — the audience has no map</a:t>
+              <a:t>New establishing shots: the audience has no map</a:t>
             </a:r>
             <a:endParaRPr/>
           </a:p>
@@ -26807,7 +26807,7 @@
             </a:pPr>
             <a:r>
               <a:rPr lang="en-US"/>
-              <a:t>Budget your effort — if everything is emphasised, nothing is</a:t>
+              <a:t>Budget your effort, if everything is emphasised, nothing is</a:t>
             </a:r>
             <a:endParaRPr/>
           </a:p>
@@ -26977,7 +26977,7 @@
             </a:pPr>
             <a:r>
               <a:rPr lang="en-US"/>
-              <a:t>The most satisfying tool you own — and it costs nothing but planning</a:t>
+              <a:t>The most satisfying tool you own, and it costs nothing but planning</a:t>
             </a:r>
             <a:endParaRPr/>
           </a:p>
@@ -27698,7 +27698,7 @@
             </a:pPr>
             <a:r>
               <a:rPr lang="en-US"/>
-              <a:t>Animation — the boards ARE the film; everything downstream follows them</a:t>
+              <a:t>Animation: the boards ARE the film; everything downstream follows them</a:t>
             </a:r>
             <a:endParaRPr/>
           </a:p>
@@ -27715,7 +27715,7 @@
             </a:pPr>
             <a:r>
               <a:rPr lang="en-US"/>
-              <a:t>Live action — usually only complex or expensive sequences get boarded</a:t>
+              <a:t>Live action: usually only complex or expensive sequences get boarded</a:t>
             </a:r>
             <a:endParaRPr/>
           </a:p>
@@ -27732,7 +27732,7 @@
             </a:pPr>
             <a:r>
               <a:rPr lang="en-US"/>
-              <a:t>Advertising — highly finished, key frames only, made to sell</a:t>
+              <a:t>Advertising: highly finished, key frames only, made to sell</a:t>
             </a:r>
             <a:endParaRPr/>
           </a:p>
@@ -27749,7 +27749,7 @@
             </a:pPr>
             <a:r>
               <a:rPr lang="en-US"/>
-              <a:t>Games — cinematics, plus a set of problems we will spend a session on</a:t>
+              <a:t>Games: cinematics, plus a set of problems we will spend a session on</a:t>
             </a:r>
             <a:endParaRPr/>
           </a:p>
@@ -28089,7 +28089,7 @@
             </a:pPr>
             <a:r>
               <a:rPr lang="en-US"/>
-              <a:t>Your job is to make it legible — and then to make it better</a:t>
+              <a:t>Your job is to make it legible, and then to make it better</a:t>
             </a:r>
             <a:endParaRPr/>
           </a:p>
@@ -28418,7 +28418,7 @@
                   <a:srgbClr val="CC702D"/>
                 </a:solidFill>
               </a:rPr>
-              <a:t>1 — LINE OF ACTION</a:t>
+              <a:t>1: LINE OF ACTION</a:t>
             </a:r>
           </a:p>
         </p:txBody>
@@ -28942,7 +28942,7 @@
                   <a:srgbClr val="CC702D"/>
                 </a:solidFill>
               </a:rPr>
-              <a:t>2 — THREE SHAPES</a:t>
+              <a:t>2: THREE SHAPES</a:t>
             </a:r>
           </a:p>
         </p:txBody>
@@ -29700,7 +29700,7 @@
                   <a:srgbClr val="CC702D"/>
                 </a:solidFill>
               </a:rPr>
-              <a:t>3 — CONNECT IT</a:t>
+              <a:t>3: CONNECT IT</a:t>
             </a:r>
           </a:p>
         </p:txBody>
@@ -31387,7 +31387,7 @@
             </a:pPr>
             <a:r>
               <a:rPr lang="en-US"/>
-              <a:t>Faces are three marks — or nothing at all</a:t>
+              <a:t>Faces are three marks, or nothing at all</a:t>
             </a:r>
             <a:endParaRPr/>
           </a:p>
@@ -31523,7 +31523,7 @@
             </a:pPr>
             <a:r>
               <a:rPr lang="en-US"/>
-              <a:t>Motion arrow — what the subject does</a:t>
+              <a:t>Motion arrow: what the subject does</a:t>
             </a:r>
             <a:endParaRPr/>
           </a:p>
@@ -31540,7 +31540,7 @@
             </a:pPr>
             <a:r>
               <a:rPr lang="en-US"/>
-              <a:t>Camera arrow — what the camera does</a:t>
+              <a:t>Camera arrow: what the camera does</a:t>
             </a:r>
             <a:endParaRPr/>
           </a:p>
@@ -31693,7 +31693,7 @@
             </a:pPr>
             <a:r>
               <a:rPr lang="en-US"/>
-              <a:t>Ten reference actions — 60 to 90 seconds each</a:t>
+              <a:t>Ten reference actions: 60 to 90 seconds each</a:t>
             </a:r>
             <a:endParaRPr/>
           </a:p>
